--- a/atelier/atelier-f10-sourcebook.pptx
+++ b/atelier/atelier-f10-sourcebook.pptx
@@ -3360,7 +3360,7 @@
         </p:nvSpPr>
         <p:spPr>
           <a:xfrm>
-            <a:off x="666750" y="5698331"/>
+            <a:off x="666750" y="5611416"/>
             <a:ext cx="5310188" cy="9525"/>
           </a:xfrm>
           <a:prstGeom prst="rect">
@@ -3404,7 +3404,7 @@
         </p:nvSpPr>
         <p:spPr>
           <a:xfrm>
-            <a:off x="666750" y="6426994"/>
+            <a:off x="666750" y="6340078"/>
             <a:ext cx="5310188" cy="9525"/>
           </a:xfrm>
           <a:prstGeom prst="rect">
@@ -3448,7 +3448,7 @@
         </p:nvSpPr>
         <p:spPr>
           <a:xfrm>
-            <a:off x="666750" y="7155656"/>
+            <a:off x="666750" y="7068741"/>
             <a:ext cx="5310188" cy="9525"/>
           </a:xfrm>
           <a:prstGeom prst="rect">
@@ -3728,7 +3728,7 @@
         </p:nvSpPr>
         <p:spPr>
           <a:xfrm>
-            <a:off x="666750" y="3331369"/>
+            <a:off x="666750" y="3418284"/>
             <a:ext cx="8877300" cy="133350"/>
           </a:xfrm>
           <a:prstGeom prst="rect">
@@ -3763,8 +3763,8 @@
         </p:nvSpPr>
         <p:spPr>
           <a:xfrm>
-            <a:off x="666750" y="3598069"/>
-            <a:ext cx="8877300" cy="857250"/>
+            <a:off x="666750" y="3684984"/>
+            <a:ext cx="8877300" cy="683419"/>
           </a:xfrm>
           <a:prstGeom prst="rect">
             <a:avLst/>
@@ -3775,7 +3775,11 @@
           <a:bodyPr wrap="none" anchor="t" lIns="0" rIns="0" tIns="0" bIns="0"/>
           <a:lstStyle/>
           <a:p>
-            <a:pPr algn="l"/>
+            <a:pPr algn="l">
+              <a:lnSpc>
+                <a:spcPct val="92000"/>
+              </a:lnSpc>
+            </a:pPr>
             <a:r>
               <a:rPr sz="5850" i="1" b="0">
                 <a:solidFill>
@@ -3798,7 +3802,7 @@
         </p:nvSpPr>
         <p:spPr>
           <a:xfrm>
-            <a:off x="666750" y="4588669"/>
+            <a:off x="666750" y="4501753"/>
             <a:ext cx="8877300" cy="104775"/>
           </a:xfrm>
           <a:prstGeom prst="rect">
@@ -3833,7 +3837,7 @@
         </p:nvSpPr>
         <p:spPr>
           <a:xfrm>
-            <a:off x="666750" y="5131594"/>
+            <a:off x="666750" y="5044678"/>
             <a:ext cx="716280" cy="230386"/>
           </a:xfrm>
           <a:prstGeom prst="rect">
@@ -3872,7 +3876,7 @@
         </p:nvSpPr>
         <p:spPr>
           <a:xfrm>
-            <a:off x="1047750" y="5131594"/>
+            <a:off x="1047750" y="5044678"/>
             <a:ext cx="6501051" cy="200025"/>
           </a:xfrm>
           <a:prstGeom prst="rect">
@@ -3907,7 +3911,7 @@
         </p:nvSpPr>
         <p:spPr>
           <a:xfrm>
-            <a:off x="1047750" y="5360194"/>
+            <a:off x="1047750" y="5273278"/>
             <a:ext cx="6501051" cy="185738"/>
           </a:xfrm>
           <a:prstGeom prst="rect">
@@ -3946,7 +3950,7 @@
         </p:nvSpPr>
         <p:spPr>
           <a:xfrm>
-            <a:off x="666750" y="5860256"/>
+            <a:off x="666750" y="5773341"/>
             <a:ext cx="716280" cy="230386"/>
           </a:xfrm>
           <a:prstGeom prst="rect">
@@ -3985,7 +3989,7 @@
         </p:nvSpPr>
         <p:spPr>
           <a:xfrm>
-            <a:off x="1047750" y="5860256"/>
+            <a:off x="1047750" y="5773341"/>
             <a:ext cx="6240542" cy="200025"/>
           </a:xfrm>
           <a:prstGeom prst="rect">
@@ -4020,7 +4024,7 @@
         </p:nvSpPr>
         <p:spPr>
           <a:xfrm>
-            <a:off x="1047750" y="6088856"/>
+            <a:off x="1047750" y="6001941"/>
             <a:ext cx="6240542" cy="185738"/>
           </a:xfrm>
           <a:prstGeom prst="rect">
@@ -4059,7 +4063,7 @@
         </p:nvSpPr>
         <p:spPr>
           <a:xfrm>
-            <a:off x="666750" y="6588919"/>
+            <a:off x="666750" y="6502003"/>
             <a:ext cx="716280" cy="230386"/>
           </a:xfrm>
           <a:prstGeom prst="rect">
@@ -4098,7 +4102,7 @@
         </p:nvSpPr>
         <p:spPr>
           <a:xfrm>
-            <a:off x="1047750" y="6588919"/>
+            <a:off x="1047750" y="6502003"/>
             <a:ext cx="6250781" cy="200025"/>
           </a:xfrm>
           <a:prstGeom prst="rect">
@@ -4133,7 +4137,7 @@
         </p:nvSpPr>
         <p:spPr>
           <a:xfrm>
-            <a:off x="1047750" y="6817519"/>
+            <a:off x="1047750" y="6730603"/>
             <a:ext cx="6250781" cy="185738"/>
           </a:xfrm>
           <a:prstGeom prst="rect">
